--- a/MATH494_Final_Presentation.pptx
+++ b/MATH494_Final_Presentation.pptx
@@ -5,24 +5,25 @@
     <p:sldMasterId id="2147483648" r:id="rId1"/>
   </p:sldMasterIdLst>
   <p:sldIdLst>
-    <p:sldId id="256" r:id="rId7"/>
-    <p:sldId id="257" r:id="rId8"/>
-    <p:sldId id="258" r:id="rId9"/>
-    <p:sldId id="259" r:id="rId10"/>
-    <p:sldId id="260" r:id="rId11"/>
-    <p:sldId id="261" r:id="rId12"/>
-    <p:sldId id="262" r:id="rId13"/>
-    <p:sldId id="263" r:id="rId14"/>
-    <p:sldId id="264" r:id="rId15"/>
-    <p:sldId id="265" r:id="rId16"/>
-    <p:sldId id="266" r:id="rId17"/>
-    <p:sldId id="267" r:id="rId18"/>
-    <p:sldId id="268" r:id="rId19"/>
-    <p:sldId id="269" r:id="rId20"/>
-    <p:sldId id="270" r:id="rId21"/>
-    <p:sldId id="271" r:id="rId22"/>
+    <p:sldId id="256" r:id="rId2"/>
+    <p:sldId id="257" r:id="rId3"/>
+    <p:sldId id="258" r:id="rId4"/>
+    <p:sldId id="259" r:id="rId5"/>
+    <p:sldId id="260" r:id="rId6"/>
+    <p:sldId id="261" r:id="rId7"/>
+    <p:sldId id="262" r:id="rId8"/>
+    <p:sldId id="263" r:id="rId9"/>
+    <p:sldId id="264" r:id="rId10"/>
+    <p:sldId id="265" r:id="rId11"/>
+    <p:sldId id="266" r:id="rId12"/>
+    <p:sldId id="267" r:id="rId13"/>
+    <p:sldId id="268" r:id="rId14"/>
+    <p:sldId id="269" r:id="rId15"/>
+    <p:sldId id="272" r:id="rId16"/>
+    <p:sldId id="270" r:id="rId17"/>
+    <p:sldId id="271" r:id="rId18"/>
   </p:sldIdLst>
-  <p:sldSz cx="12191695" cy="6858000" type="screen4x3"/>
+  <p:sldSz cx="12192000" cy="6858000"/>
   <p:notesSz cx="6858000" cy="9144000"/>
   <p:defaultTextStyle>
     <a:defPPr>
@@ -119,6 +120,22 @@
       </a:defRPr>
     </a:lvl9pPr>
   </p:defaultTextStyle>
+  <p:extLst>
+    <p:ext uri="{EFAFB233-063F-42B5-8137-9DF3F51BA10A}">
+      <p15:sldGuideLst xmlns:p15="http://schemas.microsoft.com/office/powerpoint/2012/main">
+        <p15:guide id="1" orient="horz" pos="2160">
+          <p15:clr>
+            <a:srgbClr val="A4A3A4"/>
+          </p15:clr>
+        </p15:guide>
+        <p15:guide id="2" pos="2880">
+          <p15:clr>
+            <a:srgbClr val="A4A3A4"/>
+          </p15:clr>
+        </p15:guide>
+      </p15:sldGuideLst>
+    </p:ext>
+  </p:extLst>
 </p:presentation>
 </file>
 
@@ -160,10 +177,9 @@
           <a:lstStyle/>
           <a:p>
             <a:r>
-              <a:rPr lang="en-US" smtClean="0"/>
+              <a:rPr lang="en-US"/>
               <a:t>Click to edit Master title style</a:t>
             </a:r>
-            <a:endParaRPr lang="en-US"/>
           </a:p>
         </p:txBody>
       </p:sp>
@@ -279,10 +295,9 @@
           </a:lstStyle>
           <a:p>
             <a:r>
-              <a:rPr lang="en-US" smtClean="0"/>
+              <a:rPr lang="en-US"/>
               <a:t>Click to edit Master subtitle style</a:t>
             </a:r>
-            <a:endParaRPr lang="en-US"/>
           </a:p>
         </p:txBody>
       </p:sp>
@@ -303,7 +318,7 @@
           <a:p>
             <a:fld id="{5BCAD085-E8A6-8845-BD4E-CB4CCA059FC4}" type="datetimeFigureOut">
               <a:rPr lang="en-US" smtClean="0"/>
-              <a:t>1/27/13</a:t>
+              <a:t>5/10/2026</a:t>
             </a:fld>
             <a:endParaRPr lang="en-US"/>
           </a:p>
@@ -397,10 +412,9 @@
           <a:lstStyle/>
           <a:p>
             <a:r>
-              <a:rPr lang="en-US" smtClean="0"/>
+              <a:rPr lang="en-US"/>
               <a:t>Click to edit Master title style</a:t>
             </a:r>
-            <a:endParaRPr lang="en-US"/>
           </a:p>
         </p:txBody>
       </p:sp>
@@ -421,38 +435,37 @@
           <a:p>
             <a:pPr lvl="0"/>
             <a:r>
-              <a:rPr lang="en-US" smtClean="0"/>
+              <a:rPr lang="en-US"/>
               <a:t>Click to edit Master text styles</a:t>
             </a:r>
           </a:p>
           <a:p>
             <a:pPr lvl="1"/>
             <a:r>
-              <a:rPr lang="en-US" smtClean="0"/>
+              <a:rPr lang="en-US"/>
               <a:t>Second level</a:t>
             </a:r>
           </a:p>
           <a:p>
             <a:pPr lvl="2"/>
             <a:r>
-              <a:rPr lang="en-US" smtClean="0"/>
+              <a:rPr lang="en-US"/>
               <a:t>Third level</a:t>
             </a:r>
           </a:p>
           <a:p>
             <a:pPr lvl="3"/>
             <a:r>
-              <a:rPr lang="en-US" smtClean="0"/>
+              <a:rPr lang="en-US"/>
               <a:t>Fourth level</a:t>
             </a:r>
           </a:p>
           <a:p>
             <a:pPr lvl="4"/>
             <a:r>
-              <a:rPr lang="en-US" smtClean="0"/>
+              <a:rPr lang="en-US"/>
               <a:t>Fifth level</a:t>
             </a:r>
-            <a:endParaRPr lang="en-US"/>
           </a:p>
         </p:txBody>
       </p:sp>
@@ -473,7 +486,7 @@
           <a:p>
             <a:fld id="{5BCAD085-E8A6-8845-BD4E-CB4CCA059FC4}" type="datetimeFigureOut">
               <a:rPr lang="en-US" smtClean="0"/>
-              <a:t>1/27/13</a:t>
+              <a:t>5/10/2026</a:t>
             </a:fld>
             <a:endParaRPr lang="en-US"/>
           </a:p>
@@ -572,10 +585,9 @@
           <a:lstStyle/>
           <a:p>
             <a:r>
-              <a:rPr lang="en-US" smtClean="0"/>
+              <a:rPr lang="en-US"/>
               <a:t>Click to edit Master title style</a:t>
             </a:r>
-            <a:endParaRPr lang="en-US"/>
           </a:p>
         </p:txBody>
       </p:sp>
@@ -601,38 +613,37 @@
           <a:p>
             <a:pPr lvl="0"/>
             <a:r>
-              <a:rPr lang="en-US" smtClean="0"/>
+              <a:rPr lang="en-US"/>
               <a:t>Click to edit Master text styles</a:t>
             </a:r>
           </a:p>
           <a:p>
             <a:pPr lvl="1"/>
             <a:r>
-              <a:rPr lang="en-US" smtClean="0"/>
+              <a:rPr lang="en-US"/>
               <a:t>Second level</a:t>
             </a:r>
           </a:p>
           <a:p>
             <a:pPr lvl="2"/>
             <a:r>
-              <a:rPr lang="en-US" smtClean="0"/>
+              <a:rPr lang="en-US"/>
               <a:t>Third level</a:t>
             </a:r>
           </a:p>
           <a:p>
             <a:pPr lvl="3"/>
             <a:r>
-              <a:rPr lang="en-US" smtClean="0"/>
+              <a:rPr lang="en-US"/>
               <a:t>Fourth level</a:t>
             </a:r>
           </a:p>
           <a:p>
             <a:pPr lvl="4"/>
             <a:r>
-              <a:rPr lang="en-US" smtClean="0"/>
+              <a:rPr lang="en-US"/>
               <a:t>Fifth level</a:t>
             </a:r>
-            <a:endParaRPr lang="en-US"/>
           </a:p>
         </p:txBody>
       </p:sp>
@@ -653,7 +664,7 @@
           <a:p>
             <a:fld id="{5BCAD085-E8A6-8845-BD4E-CB4CCA059FC4}" type="datetimeFigureOut">
               <a:rPr lang="en-US" smtClean="0"/>
-              <a:t>1/27/13</a:t>
+              <a:t>5/10/2026</a:t>
             </a:fld>
             <a:endParaRPr lang="en-US"/>
           </a:p>
@@ -747,10 +758,9 @@
           <a:lstStyle/>
           <a:p>
             <a:r>
-              <a:rPr lang="en-US" smtClean="0"/>
+              <a:rPr lang="en-US"/>
               <a:t>Click to edit Master title style</a:t>
             </a:r>
-            <a:endParaRPr lang="en-US"/>
           </a:p>
         </p:txBody>
       </p:sp>
@@ -771,38 +781,37 @@
           <a:p>
             <a:pPr lvl="0"/>
             <a:r>
-              <a:rPr lang="en-US" smtClean="0"/>
+              <a:rPr lang="en-US"/>
               <a:t>Click to edit Master text styles</a:t>
             </a:r>
           </a:p>
           <a:p>
             <a:pPr lvl="1"/>
             <a:r>
-              <a:rPr lang="en-US" smtClean="0"/>
+              <a:rPr lang="en-US"/>
               <a:t>Second level</a:t>
             </a:r>
           </a:p>
           <a:p>
             <a:pPr lvl="2"/>
             <a:r>
-              <a:rPr lang="en-US" smtClean="0"/>
+              <a:rPr lang="en-US"/>
               <a:t>Third level</a:t>
             </a:r>
           </a:p>
           <a:p>
             <a:pPr lvl="3"/>
             <a:r>
-              <a:rPr lang="en-US" smtClean="0"/>
+              <a:rPr lang="en-US"/>
               <a:t>Fourth level</a:t>
             </a:r>
           </a:p>
           <a:p>
             <a:pPr lvl="4"/>
             <a:r>
-              <a:rPr lang="en-US" smtClean="0"/>
+              <a:rPr lang="en-US"/>
               <a:t>Fifth level</a:t>
             </a:r>
-            <a:endParaRPr lang="en-US"/>
           </a:p>
         </p:txBody>
       </p:sp>
@@ -823,7 +832,7 @@
           <a:p>
             <a:fld id="{5BCAD085-E8A6-8845-BD4E-CB4CCA059FC4}" type="datetimeFigureOut">
               <a:rPr lang="en-US" smtClean="0"/>
-              <a:t>1/27/13</a:t>
+              <a:t>5/10/2026</a:t>
             </a:fld>
             <a:endParaRPr lang="en-US"/>
           </a:p>
@@ -926,10 +935,9 @@
           </a:lstStyle>
           <a:p>
             <a:r>
-              <a:rPr lang="en-US" smtClean="0"/>
+              <a:rPr lang="en-US"/>
               <a:t>Click to edit Master title style</a:t>
             </a:r>
-            <a:endParaRPr lang="en-US"/>
           </a:p>
         </p:txBody>
       </p:sp>
@@ -1046,7 +1054,7 @@
           <a:p>
             <a:pPr lvl="0"/>
             <a:r>
-              <a:rPr lang="en-US" smtClean="0"/>
+              <a:rPr lang="en-US"/>
               <a:t>Click to edit Master text styles</a:t>
             </a:r>
           </a:p>
@@ -1069,7 +1077,7 @@
           <a:p>
             <a:fld id="{5BCAD085-E8A6-8845-BD4E-CB4CCA059FC4}" type="datetimeFigureOut">
               <a:rPr lang="en-US" smtClean="0"/>
-              <a:t>1/27/13</a:t>
+              <a:t>5/10/2026</a:t>
             </a:fld>
             <a:endParaRPr lang="en-US"/>
           </a:p>
@@ -1163,10 +1171,9 @@
           <a:lstStyle/>
           <a:p>
             <a:r>
-              <a:rPr lang="en-US" smtClean="0"/>
+              <a:rPr lang="en-US"/>
               <a:t>Click to edit Master title style</a:t>
             </a:r>
-            <a:endParaRPr lang="en-US"/>
           </a:p>
         </p:txBody>
       </p:sp>
@@ -1220,38 +1227,37 @@
           <a:p>
             <a:pPr lvl="0"/>
             <a:r>
-              <a:rPr lang="en-US" smtClean="0"/>
+              <a:rPr lang="en-US"/>
               <a:t>Click to edit Master text styles</a:t>
             </a:r>
           </a:p>
           <a:p>
             <a:pPr lvl="1"/>
             <a:r>
-              <a:rPr lang="en-US" smtClean="0"/>
+              <a:rPr lang="en-US"/>
               <a:t>Second level</a:t>
             </a:r>
           </a:p>
           <a:p>
             <a:pPr lvl="2"/>
             <a:r>
-              <a:rPr lang="en-US" smtClean="0"/>
+              <a:rPr lang="en-US"/>
               <a:t>Third level</a:t>
             </a:r>
           </a:p>
           <a:p>
             <a:pPr lvl="3"/>
             <a:r>
-              <a:rPr lang="en-US" smtClean="0"/>
+              <a:rPr lang="en-US"/>
               <a:t>Fourth level</a:t>
             </a:r>
           </a:p>
           <a:p>
             <a:pPr lvl="4"/>
             <a:r>
-              <a:rPr lang="en-US" smtClean="0"/>
+              <a:rPr lang="en-US"/>
               <a:t>Fifth level</a:t>
             </a:r>
-            <a:endParaRPr lang="en-US"/>
           </a:p>
         </p:txBody>
       </p:sp>
@@ -1305,38 +1311,37 @@
           <a:p>
             <a:pPr lvl="0"/>
             <a:r>
-              <a:rPr lang="en-US" smtClean="0"/>
+              <a:rPr lang="en-US"/>
               <a:t>Click to edit Master text styles</a:t>
             </a:r>
           </a:p>
           <a:p>
             <a:pPr lvl="1"/>
             <a:r>
-              <a:rPr lang="en-US" smtClean="0"/>
+              <a:rPr lang="en-US"/>
               <a:t>Second level</a:t>
             </a:r>
           </a:p>
           <a:p>
             <a:pPr lvl="2"/>
             <a:r>
-              <a:rPr lang="en-US" smtClean="0"/>
+              <a:rPr lang="en-US"/>
               <a:t>Third level</a:t>
             </a:r>
           </a:p>
           <a:p>
             <a:pPr lvl="3"/>
             <a:r>
-              <a:rPr lang="en-US" smtClean="0"/>
+              <a:rPr lang="en-US"/>
               <a:t>Fourth level</a:t>
             </a:r>
           </a:p>
           <a:p>
             <a:pPr lvl="4"/>
             <a:r>
-              <a:rPr lang="en-US" smtClean="0"/>
+              <a:rPr lang="en-US"/>
               <a:t>Fifth level</a:t>
             </a:r>
-            <a:endParaRPr lang="en-US"/>
           </a:p>
         </p:txBody>
       </p:sp>
@@ -1357,7 +1362,7 @@
           <a:p>
             <a:fld id="{5BCAD085-E8A6-8845-BD4E-CB4CCA059FC4}" type="datetimeFigureOut">
               <a:rPr lang="en-US" smtClean="0"/>
-              <a:t>1/27/13</a:t>
+              <a:t>5/10/2026</a:t>
             </a:fld>
             <a:endParaRPr lang="en-US"/>
           </a:p>
@@ -1455,10 +1460,9 @@
           </a:lstStyle>
           <a:p>
             <a:r>
-              <a:rPr lang="en-US" smtClean="0"/>
+              <a:rPr lang="en-US"/>
               <a:t>Click to edit Master title style</a:t>
             </a:r>
-            <a:endParaRPr lang="en-US"/>
           </a:p>
         </p:txBody>
       </p:sp>
@@ -1521,7 +1525,7 @@
           <a:p>
             <a:pPr lvl="0"/>
             <a:r>
-              <a:rPr lang="en-US" smtClean="0"/>
+              <a:rPr lang="en-US"/>
               <a:t>Click to edit Master text styles</a:t>
             </a:r>
           </a:p>
@@ -1577,38 +1581,37 @@
           <a:p>
             <a:pPr lvl="0"/>
             <a:r>
-              <a:rPr lang="en-US" smtClean="0"/>
+              <a:rPr lang="en-US"/>
               <a:t>Click to edit Master text styles</a:t>
             </a:r>
           </a:p>
           <a:p>
             <a:pPr lvl="1"/>
             <a:r>
-              <a:rPr lang="en-US" smtClean="0"/>
+              <a:rPr lang="en-US"/>
               <a:t>Second level</a:t>
             </a:r>
           </a:p>
           <a:p>
             <a:pPr lvl="2"/>
             <a:r>
-              <a:rPr lang="en-US" smtClean="0"/>
+              <a:rPr lang="en-US"/>
               <a:t>Third level</a:t>
             </a:r>
           </a:p>
           <a:p>
             <a:pPr lvl="3"/>
             <a:r>
-              <a:rPr lang="en-US" smtClean="0"/>
+              <a:rPr lang="en-US"/>
               <a:t>Fourth level</a:t>
             </a:r>
           </a:p>
           <a:p>
             <a:pPr lvl="4"/>
             <a:r>
-              <a:rPr lang="en-US" smtClean="0"/>
+              <a:rPr lang="en-US"/>
               <a:t>Fifth level</a:t>
             </a:r>
-            <a:endParaRPr lang="en-US"/>
           </a:p>
         </p:txBody>
       </p:sp>
@@ -1671,7 +1674,7 @@
           <a:p>
             <a:pPr lvl="0"/>
             <a:r>
-              <a:rPr lang="en-US" smtClean="0"/>
+              <a:rPr lang="en-US"/>
               <a:t>Click to edit Master text styles</a:t>
             </a:r>
           </a:p>
@@ -1727,38 +1730,37 @@
           <a:p>
             <a:pPr lvl="0"/>
             <a:r>
-              <a:rPr lang="en-US" smtClean="0"/>
+              <a:rPr lang="en-US"/>
               <a:t>Click to edit Master text styles</a:t>
             </a:r>
           </a:p>
           <a:p>
             <a:pPr lvl="1"/>
             <a:r>
-              <a:rPr lang="en-US" smtClean="0"/>
+              <a:rPr lang="en-US"/>
               <a:t>Second level</a:t>
             </a:r>
           </a:p>
           <a:p>
             <a:pPr lvl="2"/>
             <a:r>
-              <a:rPr lang="en-US" smtClean="0"/>
+              <a:rPr lang="en-US"/>
               <a:t>Third level</a:t>
             </a:r>
           </a:p>
           <a:p>
             <a:pPr lvl="3"/>
             <a:r>
-              <a:rPr lang="en-US" smtClean="0"/>
+              <a:rPr lang="en-US"/>
               <a:t>Fourth level</a:t>
             </a:r>
           </a:p>
           <a:p>
             <a:pPr lvl="4"/>
             <a:r>
-              <a:rPr lang="en-US" smtClean="0"/>
+              <a:rPr lang="en-US"/>
               <a:t>Fifth level</a:t>
             </a:r>
-            <a:endParaRPr lang="en-US"/>
           </a:p>
         </p:txBody>
       </p:sp>
@@ -1779,7 +1781,7 @@
           <a:p>
             <a:fld id="{5BCAD085-E8A6-8845-BD4E-CB4CCA059FC4}" type="datetimeFigureOut">
               <a:rPr lang="en-US" smtClean="0"/>
-              <a:t>1/27/13</a:t>
+              <a:t>5/10/2026</a:t>
             </a:fld>
             <a:endParaRPr lang="en-US"/>
           </a:p>
@@ -1873,10 +1875,9 @@
           <a:lstStyle/>
           <a:p>
             <a:r>
-              <a:rPr lang="en-US" smtClean="0"/>
+              <a:rPr lang="en-US"/>
               <a:t>Click to edit Master title style</a:t>
             </a:r>
-            <a:endParaRPr lang="en-US"/>
           </a:p>
         </p:txBody>
       </p:sp>
@@ -1897,7 +1898,7 @@
           <a:p>
             <a:fld id="{5BCAD085-E8A6-8845-BD4E-CB4CCA059FC4}" type="datetimeFigureOut">
               <a:rPr lang="en-US" smtClean="0"/>
-              <a:t>1/27/13</a:t>
+              <a:t>5/10/2026</a:t>
             </a:fld>
             <a:endParaRPr lang="en-US"/>
           </a:p>
@@ -1992,7 +1993,7 @@
           <a:p>
             <a:fld id="{5BCAD085-E8A6-8845-BD4E-CB4CCA059FC4}" type="datetimeFigureOut">
               <a:rPr lang="en-US" smtClean="0"/>
-              <a:t>1/27/13</a:t>
+              <a:t>5/10/2026</a:t>
             </a:fld>
             <a:endParaRPr lang="en-US"/>
           </a:p>
@@ -2095,10 +2096,9 @@
           </a:lstStyle>
           <a:p>
             <a:r>
-              <a:rPr lang="en-US" smtClean="0"/>
+              <a:rPr lang="en-US"/>
               <a:t>Click to edit Master title style</a:t>
             </a:r>
-            <a:endParaRPr lang="en-US"/>
           </a:p>
         </p:txBody>
       </p:sp>
@@ -2152,38 +2152,37 @@
           <a:p>
             <a:pPr lvl="0"/>
             <a:r>
-              <a:rPr lang="en-US" smtClean="0"/>
+              <a:rPr lang="en-US"/>
               <a:t>Click to edit Master text styles</a:t>
             </a:r>
           </a:p>
           <a:p>
             <a:pPr lvl="1"/>
             <a:r>
-              <a:rPr lang="en-US" smtClean="0"/>
+              <a:rPr lang="en-US"/>
               <a:t>Second level</a:t>
             </a:r>
           </a:p>
           <a:p>
             <a:pPr lvl="2"/>
             <a:r>
-              <a:rPr lang="en-US" smtClean="0"/>
+              <a:rPr lang="en-US"/>
               <a:t>Third level</a:t>
             </a:r>
           </a:p>
           <a:p>
             <a:pPr lvl="3"/>
             <a:r>
-              <a:rPr lang="en-US" smtClean="0"/>
+              <a:rPr lang="en-US"/>
               <a:t>Fourth level</a:t>
             </a:r>
           </a:p>
           <a:p>
             <a:pPr lvl="4"/>
             <a:r>
-              <a:rPr lang="en-US" smtClean="0"/>
+              <a:rPr lang="en-US"/>
               <a:t>Fifth level</a:t>
             </a:r>
-            <a:endParaRPr lang="en-US"/>
           </a:p>
         </p:txBody>
       </p:sp>
@@ -2246,7 +2245,7 @@
           <a:p>
             <a:pPr lvl="0"/>
             <a:r>
-              <a:rPr lang="en-US" smtClean="0"/>
+              <a:rPr lang="en-US"/>
               <a:t>Click to edit Master text styles</a:t>
             </a:r>
           </a:p>
@@ -2269,7 +2268,7 @@
           <a:p>
             <a:fld id="{5BCAD085-E8A6-8845-BD4E-CB4CCA059FC4}" type="datetimeFigureOut">
               <a:rPr lang="en-US" smtClean="0"/>
-              <a:t>1/27/13</a:t>
+              <a:t>5/10/2026</a:t>
             </a:fld>
             <a:endParaRPr lang="en-US"/>
           </a:p>
@@ -2372,10 +2371,9 @@
           </a:lstStyle>
           <a:p>
             <a:r>
-              <a:rPr lang="en-US" smtClean="0"/>
+              <a:rPr lang="en-US"/>
               <a:t>Click to edit Master title style</a:t>
             </a:r>
-            <a:endParaRPr lang="en-US"/>
           </a:p>
         </p:txBody>
       </p:sp>
@@ -2499,7 +2497,7 @@
           <a:p>
             <a:pPr lvl="0"/>
             <a:r>
-              <a:rPr lang="en-US" smtClean="0"/>
+              <a:rPr lang="en-US"/>
               <a:t>Click to edit Master text styles</a:t>
             </a:r>
           </a:p>
@@ -2522,7 +2520,7 @@
           <a:p>
             <a:fld id="{5BCAD085-E8A6-8845-BD4E-CB4CCA059FC4}" type="datetimeFigureOut">
               <a:rPr lang="en-US" smtClean="0"/>
-              <a:t>1/27/13</a:t>
+              <a:t>5/10/2026</a:t>
             </a:fld>
             <a:endParaRPr lang="en-US"/>
           </a:p>
@@ -2631,10 +2629,9 @@
           <a:lstStyle/>
           <a:p>
             <a:r>
-              <a:rPr lang="en-US" smtClean="0"/>
+              <a:rPr lang="en-US"/>
               <a:t>Click to edit Master title style</a:t>
             </a:r>
-            <a:endParaRPr lang="en-US"/>
           </a:p>
         </p:txBody>
       </p:sp>
@@ -2665,38 +2662,37 @@
           <a:p>
             <a:pPr lvl="0"/>
             <a:r>
-              <a:rPr lang="en-US" smtClean="0"/>
+              <a:rPr lang="en-US"/>
               <a:t>Click to edit Master text styles</a:t>
             </a:r>
           </a:p>
           <a:p>
             <a:pPr lvl="1"/>
             <a:r>
-              <a:rPr lang="en-US" smtClean="0"/>
+              <a:rPr lang="en-US"/>
               <a:t>Second level</a:t>
             </a:r>
           </a:p>
           <a:p>
             <a:pPr lvl="2"/>
             <a:r>
-              <a:rPr lang="en-US" smtClean="0"/>
+              <a:rPr lang="en-US"/>
               <a:t>Third level</a:t>
             </a:r>
           </a:p>
           <a:p>
             <a:pPr lvl="3"/>
             <a:r>
-              <a:rPr lang="en-US" smtClean="0"/>
+              <a:rPr lang="en-US"/>
               <a:t>Fourth level</a:t>
             </a:r>
           </a:p>
           <a:p>
             <a:pPr lvl="4"/>
             <a:r>
-              <a:rPr lang="en-US" smtClean="0"/>
+              <a:rPr lang="en-US"/>
               <a:t>Fifth level</a:t>
             </a:r>
-            <a:endParaRPr lang="en-US"/>
           </a:p>
         </p:txBody>
       </p:sp>
@@ -2735,7 +2731,7 @@
           <a:p>
             <a:fld id="{5BCAD085-E8A6-8845-BD4E-CB4CCA059FC4}" type="datetimeFigureOut">
               <a:rPr lang="en-US" smtClean="0"/>
-              <a:t>1/27/13</a:t>
+              <a:t>5/10/2026</a:t>
             </a:fld>
             <a:endParaRPr lang="en-US"/>
           </a:p>
@@ -3094,7 +3090,7 @@
 </file>
 
 <file path=ppt/slides/slide1.xml><?xml version="1.0" encoding="utf-8"?>
-<p:sld xmlns:a="http://schemas.openxmlformats.org/drawingml/2006/main" xmlns:p="http://schemas.openxmlformats.org/presentationml/2006/main" xmlns:r="http://schemas.openxmlformats.org/officeDocument/2006/relationships">
+<p:sld xmlns:a="http://schemas.openxmlformats.org/drawingml/2006/main" xmlns:r="http://schemas.openxmlformats.org/officeDocument/2006/relationships" xmlns:p="http://schemas.openxmlformats.org/presentationml/2006/main">
   <p:cSld>
     <p:bg>
       <p:bgPr>
@@ -3110,7 +3106,14 @@
         <p:cNvGrpSpPr/>
         <p:nvPr/>
       </p:nvGrpSpPr>
-      <p:grpSpPr/>
+      <p:grpSpPr>
+        <a:xfrm>
+          <a:off x="0" y="0"/>
+          <a:ext cx="0" cy="0"/>
+          <a:chOff x="0" y="0"/>
+          <a:chExt cx="0" cy="0"/>
+        </a:xfrm>
+      </p:grpSpPr>
       <p:sp>
         <p:nvSpPr>
           <p:cNvPr id="2" name="Rectangle 1"/>
@@ -3151,6 +3154,7 @@
           <a:lstStyle/>
           <a:p>
             <a:pPr algn="ctr"/>
+            <a:endParaRPr/>
           </a:p>
         </p:txBody>
       </p:sp>
@@ -3368,7 +3372,7 @@
               </a:spcAft>
             </a:pPr>
             <a:r>
-              <a:rPr b="1" sz="1600">
+              <a:rPr sz="1600" b="1">
                 <a:solidFill>
                   <a:srgbClr val="11284C"/>
                 </a:solidFill>
@@ -3409,7 +3413,7 @@
 </file>
 
 <file path=ppt/slides/slide10.xml><?xml version="1.0" encoding="utf-8"?>
-<p:sld xmlns:a="http://schemas.openxmlformats.org/drawingml/2006/main" xmlns:p="http://schemas.openxmlformats.org/presentationml/2006/main" xmlns:r="http://schemas.openxmlformats.org/officeDocument/2006/relationships">
+<p:sld xmlns:a="http://schemas.openxmlformats.org/drawingml/2006/main" xmlns:r="http://schemas.openxmlformats.org/officeDocument/2006/relationships" xmlns:p="http://schemas.openxmlformats.org/presentationml/2006/main">
   <p:cSld>
     <p:bg>
       <p:bgPr>
@@ -3425,7 +3429,14 @@
         <p:cNvGrpSpPr/>
         <p:nvPr/>
       </p:nvGrpSpPr>
-      <p:grpSpPr/>
+      <p:grpSpPr>
+        <a:xfrm>
+          <a:off x="0" y="0"/>
+          <a:ext cx="0" cy="0"/>
+          <a:chOff x="0" y="0"/>
+          <a:chExt cx="0" cy="0"/>
+        </a:xfrm>
+      </p:grpSpPr>
       <p:sp>
         <p:nvSpPr>
           <p:cNvPr id="2" name="Rectangle 1"/>
@@ -3466,6 +3477,7 @@
           <a:lstStyle/>
           <a:p>
             <a:pPr algn="ctr"/>
+            <a:endParaRPr/>
           </a:p>
         </p:txBody>
       </p:sp>
@@ -3695,7 +3707,7 @@
 </file>
 
 <file path=ppt/slides/slide11.xml><?xml version="1.0" encoding="utf-8"?>
-<p:sld xmlns:a="http://schemas.openxmlformats.org/drawingml/2006/main" xmlns:p="http://schemas.openxmlformats.org/presentationml/2006/main" xmlns:r="http://schemas.openxmlformats.org/officeDocument/2006/relationships">
+<p:sld xmlns:a="http://schemas.openxmlformats.org/drawingml/2006/main" xmlns:r="http://schemas.openxmlformats.org/officeDocument/2006/relationships" xmlns:p="http://schemas.openxmlformats.org/presentationml/2006/main">
   <p:cSld>
     <p:bg>
       <p:bgPr>
@@ -3711,7 +3723,14 @@
         <p:cNvGrpSpPr/>
         <p:nvPr/>
       </p:nvGrpSpPr>
-      <p:grpSpPr/>
+      <p:grpSpPr>
+        <a:xfrm>
+          <a:off x="0" y="0"/>
+          <a:ext cx="0" cy="0"/>
+          <a:chOff x="0" y="0"/>
+          <a:chExt cx="0" cy="0"/>
+        </a:xfrm>
+      </p:grpSpPr>
       <p:sp>
         <p:nvSpPr>
           <p:cNvPr id="2" name="Rectangle 1"/>
@@ -3752,6 +3771,7 @@
           <a:lstStyle/>
           <a:p>
             <a:pPr algn="ctr"/>
+            <a:endParaRPr/>
           </a:p>
         </p:txBody>
       </p:sp>
@@ -3956,7 +3976,7 @@
               </a:spcAft>
             </a:pPr>
             <a:r>
-              <a:rPr b="1" sz="1600">
+              <a:rPr sz="1600" b="1">
                 <a:solidFill>
                   <a:srgbClr val="11284C"/>
                 </a:solidFill>
@@ -3989,7 +4009,7 @@
 </file>
 
 <file path=ppt/slides/slide12.xml><?xml version="1.0" encoding="utf-8"?>
-<p:sld xmlns:a="http://schemas.openxmlformats.org/drawingml/2006/main" xmlns:p="http://schemas.openxmlformats.org/presentationml/2006/main" xmlns:r="http://schemas.openxmlformats.org/officeDocument/2006/relationships">
+<p:sld xmlns:a="http://schemas.openxmlformats.org/drawingml/2006/main" xmlns:r="http://schemas.openxmlformats.org/officeDocument/2006/relationships" xmlns:p="http://schemas.openxmlformats.org/presentationml/2006/main">
   <p:cSld>
     <p:bg>
       <p:bgPr>
@@ -4005,7 +4025,14 @@
         <p:cNvGrpSpPr/>
         <p:nvPr/>
       </p:nvGrpSpPr>
-      <p:grpSpPr/>
+      <p:grpSpPr>
+        <a:xfrm>
+          <a:off x="0" y="0"/>
+          <a:ext cx="0" cy="0"/>
+          <a:chOff x="0" y="0"/>
+          <a:chExt cx="0" cy="0"/>
+        </a:xfrm>
+      </p:grpSpPr>
       <p:sp>
         <p:nvSpPr>
           <p:cNvPr id="2" name="Rectangle 1"/>
@@ -4046,6 +4073,7 @@
           <a:lstStyle/>
           <a:p>
             <a:pPr algn="ctr"/>
+            <a:endParaRPr/>
           </a:p>
         </p:txBody>
       </p:sp>
@@ -4291,7 +4319,7 @@
 </file>
 
 <file path=ppt/slides/slide13.xml><?xml version="1.0" encoding="utf-8"?>
-<p:sld xmlns:a="http://schemas.openxmlformats.org/drawingml/2006/main" xmlns:p="http://schemas.openxmlformats.org/presentationml/2006/main" xmlns:r="http://schemas.openxmlformats.org/officeDocument/2006/relationships">
+<p:sld xmlns:a="http://schemas.openxmlformats.org/drawingml/2006/main" xmlns:r="http://schemas.openxmlformats.org/officeDocument/2006/relationships" xmlns:p="http://schemas.openxmlformats.org/presentationml/2006/main">
   <p:cSld>
     <p:bg>
       <p:bgPr>
@@ -4307,7 +4335,14 @@
         <p:cNvGrpSpPr/>
         <p:nvPr/>
       </p:nvGrpSpPr>
-      <p:grpSpPr/>
+      <p:grpSpPr>
+        <a:xfrm>
+          <a:off x="0" y="0"/>
+          <a:ext cx="0" cy="0"/>
+          <a:chOff x="0" y="0"/>
+          <a:chExt cx="0" cy="0"/>
+        </a:xfrm>
+      </p:grpSpPr>
       <p:sp>
         <p:nvSpPr>
           <p:cNvPr id="2" name="Rectangle 1"/>
@@ -4348,6 +4383,7 @@
           <a:lstStyle/>
           <a:p>
             <a:pPr algn="ctr"/>
+            <a:endParaRPr/>
           </a:p>
         </p:txBody>
       </p:sp>
@@ -4641,7 +4677,7 @@
 </file>
 
 <file path=ppt/slides/slide14.xml><?xml version="1.0" encoding="utf-8"?>
-<p:sld xmlns:a="http://schemas.openxmlformats.org/drawingml/2006/main" xmlns:p="http://schemas.openxmlformats.org/presentationml/2006/main" xmlns:r="http://schemas.openxmlformats.org/officeDocument/2006/relationships">
+<p:sld xmlns:a="http://schemas.openxmlformats.org/drawingml/2006/main" xmlns:r="http://schemas.openxmlformats.org/officeDocument/2006/relationships" xmlns:p="http://schemas.openxmlformats.org/presentationml/2006/main">
   <p:cSld>
     <p:bg>
       <p:bgPr>
@@ -4657,7 +4693,14 @@
         <p:cNvGrpSpPr/>
         <p:nvPr/>
       </p:nvGrpSpPr>
-      <p:grpSpPr/>
+      <p:grpSpPr>
+        <a:xfrm>
+          <a:off x="0" y="0"/>
+          <a:ext cx="0" cy="0"/>
+          <a:chOff x="0" y="0"/>
+          <a:chExt cx="0" cy="0"/>
+        </a:xfrm>
+      </p:grpSpPr>
       <p:sp>
         <p:nvSpPr>
           <p:cNvPr id="2" name="Rectangle 1"/>
@@ -4698,6 +4741,7 @@
           <a:lstStyle/>
           <a:p>
             <a:pPr algn="ctr"/>
+            <a:endParaRPr/>
           </a:p>
         </p:txBody>
       </p:sp>
@@ -4854,7 +4898,7 @@
               </a:spcAft>
             </a:pPr>
             <a:r>
-              <a:rPr b="1" sz="1600">
+              <a:rPr sz="1600" b="1">
                 <a:solidFill>
                   <a:srgbClr val="11284C"/>
                 </a:solidFill>
@@ -4943,6 +4987,7 @@
                 <a:latin typeface="Consolas"/>
               </a:defRPr>
             </a:pPr>
+            <a:endParaRPr/>
           </a:p>
           <a:p>
             <a:pPr>
@@ -4966,6 +5011,7 @@
                 <a:latin typeface="Consolas"/>
               </a:defRPr>
             </a:pPr>
+            <a:endParaRPr/>
           </a:p>
           <a:p>
             <a:pPr>
@@ -5081,7 +5127,7 @@
               </a:spcAft>
             </a:pPr>
             <a:r>
-              <a:rPr b="1" sz="1600">
+              <a:rPr sz="1600" b="1">
                 <a:solidFill>
                   <a:srgbClr val="11284C"/>
                 </a:solidFill>
@@ -5114,7 +5160,603 @@
 </file>
 
 <file path=ppt/slides/slide15.xml><?xml version="1.0" encoding="utf-8"?>
-<p:sld xmlns:a="http://schemas.openxmlformats.org/drawingml/2006/main" xmlns:p="http://schemas.openxmlformats.org/presentationml/2006/main" xmlns:r="http://schemas.openxmlformats.org/officeDocument/2006/relationships">
+<p:sld xmlns:a="http://schemas.openxmlformats.org/drawingml/2006/main" xmlns:r="http://schemas.openxmlformats.org/officeDocument/2006/relationships" xmlns:p="http://schemas.openxmlformats.org/presentationml/2006/main">
+  <p:cSld>
+    <p:bg>
+      <p:bgPr>
+        <a:solidFill>
+          <a:srgbClr val="FFFFFF"/>
+        </a:solidFill>
+        <a:effectLst/>
+      </p:bgPr>
+    </p:bg>
+    <p:spTree>
+      <p:nvGrpSpPr>
+        <p:cNvPr id="1" name="">
+          <a:extLst>
+            <a:ext uri="{FF2B5EF4-FFF2-40B4-BE49-F238E27FC236}">
+              <a16:creationId xmlns:a16="http://schemas.microsoft.com/office/drawing/2014/main" id="{D84C2B03-D1BE-0FAF-3B28-8A9EF444EC8D}"/>
+            </a:ext>
+          </a:extLst>
+        </p:cNvPr>
+        <p:cNvGrpSpPr/>
+        <p:nvPr/>
+      </p:nvGrpSpPr>
+      <p:grpSpPr>
+        <a:xfrm>
+          <a:off x="0" y="0"/>
+          <a:ext cx="0" cy="0"/>
+          <a:chOff x="0" y="0"/>
+          <a:chExt cx="0" cy="0"/>
+        </a:xfrm>
+      </p:grpSpPr>
+      <p:sp>
+        <p:nvSpPr>
+          <p:cNvPr id="2" name="Rectangle 1">
+            <a:extLst>
+              <a:ext uri="{FF2B5EF4-FFF2-40B4-BE49-F238E27FC236}">
+                <a16:creationId xmlns:a16="http://schemas.microsoft.com/office/drawing/2014/main" id="{B7E7C04C-4CC8-55C7-5BF8-F341D1327682}"/>
+              </a:ext>
+            </a:extLst>
+          </p:cNvPr>
+          <p:cNvSpPr/>
+          <p:nvPr/>
+        </p:nvSpPr>
+        <p:spPr>
+          <a:xfrm>
+            <a:off x="0" y="0"/>
+            <a:ext cx="12191695" cy="640080"/>
+          </a:xfrm>
+          <a:prstGeom prst="rect">
+            <a:avLst/>
+          </a:prstGeom>
+          <a:solidFill>
+            <a:srgbClr val="11284C"/>
+          </a:solidFill>
+          <a:ln>
+            <a:noFill/>
+          </a:ln>
+        </p:spPr>
+        <p:style>
+          <a:lnRef idx="1">
+            <a:schemeClr val="accent1"/>
+          </a:lnRef>
+          <a:fillRef idx="3">
+            <a:schemeClr val="accent1"/>
+          </a:fillRef>
+          <a:effectRef idx="2">
+            <a:schemeClr val="accent1"/>
+          </a:effectRef>
+          <a:fontRef idx="minor">
+            <a:schemeClr val="lt1"/>
+          </a:fontRef>
+        </p:style>
+        <p:txBody>
+          <a:bodyPr rtlCol="0" anchor="ctr"/>
+          <a:lstStyle/>
+          <a:p>
+            <a:pPr algn="ctr"/>
+            <a:endParaRPr/>
+          </a:p>
+        </p:txBody>
+      </p:sp>
+      <p:sp>
+        <p:nvSpPr>
+          <p:cNvPr id="3" name="TextBox 2">
+            <a:extLst>
+              <a:ext uri="{FF2B5EF4-FFF2-40B4-BE49-F238E27FC236}">
+                <a16:creationId xmlns:a16="http://schemas.microsoft.com/office/drawing/2014/main" id="{020847A9-3ADA-EDC7-C537-E16885FE5670}"/>
+              </a:ext>
+            </a:extLst>
+          </p:cNvPr>
+          <p:cNvSpPr txBox="1"/>
+          <p:nvPr/>
+        </p:nvSpPr>
+        <p:spPr>
+          <a:xfrm>
+            <a:off x="411480" y="109728"/>
+            <a:ext cx="10789920" cy="320040"/>
+          </a:xfrm>
+          <a:prstGeom prst="rect">
+            <a:avLst/>
+          </a:prstGeom>
+          <a:noFill/>
+        </p:spPr>
+        <p:txBody>
+          <a:bodyPr wrap="none">
+            <a:spAutoFit/>
+          </a:bodyPr>
+          <a:lstStyle/>
+          <a:p>
+            <a:r>
+              <a:rPr sz="2400" b="1">
+                <a:solidFill>
+                  <a:srgbClr val="FFFFFF"/>
+                </a:solidFill>
+                <a:latin typeface="Aptos"/>
+              </a:rPr>
+              <a:t>Practical Output: Terminal Prediction Tool</a:t>
+            </a:r>
+          </a:p>
+        </p:txBody>
+      </p:sp>
+      <p:sp>
+        <p:nvSpPr>
+          <p:cNvPr id="4" name="TextBox 3">
+            <a:extLst>
+              <a:ext uri="{FF2B5EF4-FFF2-40B4-BE49-F238E27FC236}">
+                <a16:creationId xmlns:a16="http://schemas.microsoft.com/office/drawing/2014/main" id="{B8CBA4F0-ED0B-0861-4F5E-F82BB97E2333}"/>
+              </a:ext>
+            </a:extLst>
+          </p:cNvPr>
+          <p:cNvSpPr txBox="1"/>
+          <p:nvPr/>
+        </p:nvSpPr>
+        <p:spPr>
+          <a:xfrm>
+            <a:off x="457200" y="749808"/>
+            <a:ext cx="10972800" cy="411480"/>
+          </a:xfrm>
+          <a:prstGeom prst="rect">
+            <a:avLst/>
+          </a:prstGeom>
+          <a:noFill/>
+        </p:spPr>
+        <p:txBody>
+          <a:bodyPr wrap="none">
+            <a:spAutoFit/>
+          </a:bodyPr>
+          <a:lstStyle/>
+          <a:p>
+            <a:pPr>
+              <a:defRPr sz="1300">
+                <a:solidFill>
+                  <a:srgbClr val="646464"/>
+                </a:solidFill>
+                <a:latin typeface="Aptos"/>
+              </a:defRPr>
+            </a:pPr>
+            <a:r>
+              <a:t>From analysis to a usable mini-application</a:t>
+            </a:r>
+          </a:p>
+        </p:txBody>
+      </p:sp>
+      <p:sp>
+        <p:nvSpPr>
+          <p:cNvPr id="5" name="TextBox 4">
+            <a:extLst>
+              <a:ext uri="{FF2B5EF4-FFF2-40B4-BE49-F238E27FC236}">
+                <a16:creationId xmlns:a16="http://schemas.microsoft.com/office/drawing/2014/main" id="{7F60FD37-C6D6-1AB8-5DEE-5C0884BB25CC}"/>
+              </a:ext>
+            </a:extLst>
+          </p:cNvPr>
+          <p:cNvSpPr txBox="1"/>
+          <p:nvPr/>
+        </p:nvSpPr>
+        <p:spPr>
+          <a:xfrm>
+            <a:off x="411480" y="6473952"/>
+            <a:ext cx="11247120" cy="228600"/>
+          </a:xfrm>
+          <a:prstGeom prst="rect">
+            <a:avLst/>
+          </a:prstGeom>
+          <a:noFill/>
+        </p:spPr>
+        <p:txBody>
+          <a:bodyPr wrap="none">
+            <a:spAutoFit/>
+          </a:bodyPr>
+          <a:lstStyle/>
+          <a:p>
+            <a:pPr>
+              <a:defRPr sz="900">
+                <a:solidFill>
+                  <a:srgbClr val="646464"/>
+                </a:solidFill>
+                <a:latin typeface="Aptos"/>
+              </a:defRPr>
+            </a:pPr>
+            <a:r>
+              <a:t>Victor Um | MATH 494 | NBA player performance modeling</a:t>
+            </a:r>
+          </a:p>
+        </p:txBody>
+      </p:sp>
+      <p:sp>
+        <p:nvSpPr>
+          <p:cNvPr id="6" name="Rounded Rectangle 5">
+            <a:extLst>
+              <a:ext uri="{FF2B5EF4-FFF2-40B4-BE49-F238E27FC236}">
+                <a16:creationId xmlns:a16="http://schemas.microsoft.com/office/drawing/2014/main" id="{1C5F0F7B-B68F-43B3-2F7B-BBE47266C8D1}"/>
+              </a:ext>
+            </a:extLst>
+          </p:cNvPr>
+          <p:cNvSpPr/>
+          <p:nvPr/>
+        </p:nvSpPr>
+        <p:spPr>
+          <a:xfrm>
+            <a:off x="640080" y="1325880"/>
+            <a:ext cx="5120640" cy="3657600"/>
+          </a:xfrm>
+          <a:prstGeom prst="roundRect">
+            <a:avLst/>
+          </a:prstGeom>
+          <a:solidFill>
+            <a:srgbClr val="E5EFF9"/>
+          </a:solidFill>
+          <a:ln>
+            <a:solidFill>
+              <a:srgbClr val="2962A6"/>
+            </a:solidFill>
+          </a:ln>
+        </p:spPr>
+        <p:style>
+          <a:lnRef idx="1">
+            <a:schemeClr val="accent1"/>
+          </a:lnRef>
+          <a:fillRef idx="3">
+            <a:schemeClr val="accent1"/>
+          </a:fillRef>
+          <a:effectRef idx="2">
+            <a:schemeClr val="accent1"/>
+          </a:effectRef>
+          <a:fontRef idx="minor">
+            <a:schemeClr val="lt1"/>
+          </a:fontRef>
+        </p:style>
+        <p:txBody>
+          <a:bodyPr rtlCol="0" anchor="ctr"/>
+          <a:lstStyle/>
+          <a:p>
+            <a:pPr algn="ctr">
+              <a:spcAft>
+                <a:spcPts val="600"/>
+              </a:spcAft>
+            </a:pPr>
+            <a:r>
+              <a:rPr sz="1600" b="1">
+                <a:solidFill>
+                  <a:srgbClr val="11284C"/>
+                </a:solidFill>
+                <a:latin typeface="Aptos"/>
+              </a:rPr>
+              <a:t>What the tool does</a:t>
+            </a:r>
+          </a:p>
+          <a:p>
+            <a:pPr>
+              <a:defRPr sz="1400">
+                <a:solidFill>
+                  <a:srgbClr val="222222"/>
+                </a:solidFill>
+                <a:latin typeface="Aptos"/>
+              </a:defRPr>
+            </a:pPr>
+            <a:r>
+              <a:t>After the final models are trained, the saved bundle lets me type a player name in the terminal and get predicted next-season PTS, REB, AST, and TS%.</a:t>
+            </a:r>
+            <a:br/>
+            <a:br/>
+            <a:r>
+              <a:t>It uses the player's most recent row in the dataset as the input profile.</a:t>
+            </a:r>
+          </a:p>
+        </p:txBody>
+      </p:sp>
+      <p:sp>
+        <p:nvSpPr>
+          <p:cNvPr id="7" name="Rounded Rectangle 6">
+            <a:extLst>
+              <a:ext uri="{FF2B5EF4-FFF2-40B4-BE49-F238E27FC236}">
+                <a16:creationId xmlns:a16="http://schemas.microsoft.com/office/drawing/2014/main" id="{70E60578-E9B5-D45C-40E0-2ECE9B6ECB44}"/>
+              </a:ext>
+            </a:extLst>
+          </p:cNvPr>
+          <p:cNvSpPr/>
+          <p:nvPr/>
+        </p:nvSpPr>
+        <p:spPr>
+          <a:xfrm>
+            <a:off x="6035040" y="1234440"/>
+            <a:ext cx="5303520" cy="3977639"/>
+          </a:xfrm>
+          <a:prstGeom prst="roundRect">
+            <a:avLst/>
+          </a:prstGeom>
+          <a:solidFill>
+            <a:srgbClr val="1C2026"/>
+          </a:solidFill>
+          <a:ln>
+            <a:noFill/>
+          </a:ln>
+        </p:spPr>
+        <p:style>
+          <a:lnRef idx="1">
+            <a:schemeClr val="accent1"/>
+          </a:lnRef>
+          <a:fillRef idx="3">
+            <a:schemeClr val="accent1"/>
+          </a:fillRef>
+          <a:effectRef idx="2">
+            <a:schemeClr val="accent1"/>
+          </a:effectRef>
+          <a:fontRef idx="minor">
+            <a:schemeClr val="lt1"/>
+          </a:fontRef>
+        </p:style>
+        <p:txBody>
+          <a:bodyPr rtlCol="0" anchor="ctr"/>
+          <a:lstStyle/>
+          <a:p>
+            <a:pPr algn="ctr">
+              <a:defRPr sz="1500">
+                <a:solidFill>
+                  <a:srgbClr val="E6E6E6"/>
+                </a:solidFill>
+                <a:latin typeface="Consolas"/>
+              </a:defRPr>
+            </a:pPr>
+            <a:r>
+              <a:t>python predict_next_season.py</a:t>
+            </a:r>
+          </a:p>
+          <a:p>
+            <a:pPr>
+              <a:defRPr sz="1400">
+                <a:solidFill>
+                  <a:srgbClr val="E6E6E6"/>
+                </a:solidFill>
+                <a:latin typeface="Consolas"/>
+              </a:defRPr>
+            </a:pPr>
+            <a:endParaRPr/>
+          </a:p>
+          <a:p>
+            <a:pPr>
+              <a:defRPr sz="1400">
+                <a:solidFill>
+                  <a:srgbClr val="E6E6E6"/>
+                </a:solidFill>
+                <a:latin typeface="Consolas"/>
+              </a:defRPr>
+            </a:pPr>
+            <a:r>
+              <a:t>Player name: LeBron James</a:t>
+            </a:r>
+          </a:p>
+          <a:p>
+            <a:pPr>
+              <a:defRPr sz="1400">
+                <a:solidFill>
+                  <a:srgbClr val="E6E6E6"/>
+                </a:solidFill>
+                <a:latin typeface="Consolas"/>
+              </a:defRPr>
+            </a:pPr>
+            <a:endParaRPr/>
+          </a:p>
+          <a:p>
+            <a:pPr>
+              <a:defRPr sz="1400">
+                <a:solidFill>
+                  <a:srgbClr val="E6E6E6"/>
+                </a:solidFill>
+                <a:latin typeface="Consolas"/>
+              </a:defRPr>
+            </a:pPr>
+            <a:r>
+              <a:t>Outputs:</a:t>
+            </a:r>
+          </a:p>
+          <a:p>
+            <a:pPr>
+              <a:defRPr sz="1400">
+                <a:solidFill>
+                  <a:srgbClr val="E6E6E6"/>
+                </a:solidFill>
+                <a:latin typeface="Consolas"/>
+              </a:defRPr>
+            </a:pPr>
+            <a:r>
+              <a:t>- Predicted next-season PTS</a:t>
+            </a:r>
+          </a:p>
+          <a:p>
+            <a:pPr>
+              <a:defRPr sz="1400">
+                <a:solidFill>
+                  <a:srgbClr val="E6E6E6"/>
+                </a:solidFill>
+                <a:latin typeface="Consolas"/>
+              </a:defRPr>
+            </a:pPr>
+            <a:r>
+              <a:t>- Predicted next-season REB</a:t>
+            </a:r>
+          </a:p>
+          <a:p>
+            <a:pPr>
+              <a:defRPr sz="1400">
+                <a:solidFill>
+                  <a:srgbClr val="E6E6E6"/>
+                </a:solidFill>
+                <a:latin typeface="Consolas"/>
+              </a:defRPr>
+            </a:pPr>
+            <a:r>
+              <a:t>- Predicted next-season AST</a:t>
+            </a:r>
+          </a:p>
+          <a:p>
+            <a:pPr>
+              <a:defRPr sz="1400">
+                <a:solidFill>
+                  <a:srgbClr val="E6E6E6"/>
+                </a:solidFill>
+                <a:latin typeface="Consolas"/>
+              </a:defRPr>
+            </a:pPr>
+            <a:r>
+              <a:t>- Predicted next-season TS%</a:t>
+            </a:r>
+          </a:p>
+        </p:txBody>
+      </p:sp>
+      <p:sp>
+        <p:nvSpPr>
+          <p:cNvPr id="8" name="Rounded Rectangle 7">
+            <a:extLst>
+              <a:ext uri="{FF2B5EF4-FFF2-40B4-BE49-F238E27FC236}">
+                <a16:creationId xmlns:a16="http://schemas.microsoft.com/office/drawing/2014/main" id="{62EA4E8D-7DF8-7FF0-A177-36AE8AB14297}"/>
+              </a:ext>
+            </a:extLst>
+          </p:cNvPr>
+          <p:cNvSpPr/>
+          <p:nvPr/>
+        </p:nvSpPr>
+        <p:spPr>
+          <a:xfrm>
+            <a:off x="1554480" y="5440680"/>
+            <a:ext cx="9235440" cy="640080"/>
+          </a:xfrm>
+          <a:prstGeom prst="roundRect">
+            <a:avLst/>
+          </a:prstGeom>
+          <a:solidFill>
+            <a:srgbClr val="E5EFF9"/>
+          </a:solidFill>
+          <a:ln>
+            <a:solidFill>
+              <a:srgbClr val="2962A6"/>
+            </a:solidFill>
+          </a:ln>
+        </p:spPr>
+        <p:style>
+          <a:lnRef idx="1">
+            <a:schemeClr val="accent1"/>
+          </a:lnRef>
+          <a:fillRef idx="3">
+            <a:schemeClr val="accent1"/>
+          </a:fillRef>
+          <a:effectRef idx="2">
+            <a:schemeClr val="accent1"/>
+          </a:effectRef>
+          <a:fontRef idx="minor">
+            <a:schemeClr val="lt1"/>
+          </a:fontRef>
+        </p:style>
+        <p:txBody>
+          <a:bodyPr rtlCol="0" anchor="ctr"/>
+          <a:lstStyle/>
+          <a:p>
+            <a:pPr algn="ctr">
+              <a:spcAft>
+                <a:spcPts val="600"/>
+              </a:spcAft>
+            </a:pPr>
+            <a:r>
+              <a:rPr sz="1600" b="1">
+                <a:solidFill>
+                  <a:srgbClr val="11284C"/>
+                </a:solidFill>
+                <a:latin typeface="Aptos"/>
+              </a:rPr>
+              <a:t>Why include this?</a:t>
+            </a:r>
+          </a:p>
+          <a:p>
+            <a:pPr>
+              <a:defRPr sz="1400">
+                <a:solidFill>
+                  <a:srgbClr val="222222"/>
+                </a:solidFill>
+                <a:latin typeface="Aptos"/>
+              </a:defRPr>
+            </a:pPr>
+            <a:r>
+              <a:t>It shows the project can move from a research presentation into a simple, user-facing prediction tool.</a:t>
+            </a:r>
+          </a:p>
+        </p:txBody>
+      </p:sp>
+      <p:pic>
+        <p:nvPicPr>
+          <p:cNvPr id="10" name="Picture 9">
+            <a:extLst>
+              <a:ext uri="{FF2B5EF4-FFF2-40B4-BE49-F238E27FC236}">
+                <a16:creationId xmlns:a16="http://schemas.microsoft.com/office/drawing/2014/main" id="{199A1690-5BAB-A76E-95FA-A39BAB8629C2}"/>
+              </a:ext>
+            </a:extLst>
+          </p:cNvPr>
+          <p:cNvPicPr>
+            <a:picLocks noChangeAspect="1"/>
+          </p:cNvPicPr>
+          <p:nvPr/>
+        </p:nvPicPr>
+        <p:blipFill>
+          <a:blip r:embed="rId2"/>
+          <a:stretch>
+            <a:fillRect/>
+          </a:stretch>
+        </p:blipFill>
+        <p:spPr>
+          <a:xfrm>
+            <a:off x="71351" y="749086"/>
+            <a:ext cx="12049297" cy="5352314"/>
+          </a:xfrm>
+          <a:prstGeom prst="rect">
+            <a:avLst/>
+          </a:prstGeom>
+        </p:spPr>
+      </p:pic>
+      <p:pic>
+        <p:nvPicPr>
+          <p:cNvPr id="12" name="Picture 11">
+            <a:extLst>
+              <a:ext uri="{FF2B5EF4-FFF2-40B4-BE49-F238E27FC236}">
+                <a16:creationId xmlns:a16="http://schemas.microsoft.com/office/drawing/2014/main" id="{AC08E407-1832-027B-B815-270BE9C355DB}"/>
+              </a:ext>
+            </a:extLst>
+          </p:cNvPr>
+          <p:cNvPicPr>
+            <a:picLocks noChangeAspect="1"/>
+          </p:cNvPicPr>
+          <p:nvPr/>
+        </p:nvPicPr>
+        <p:blipFill>
+          <a:blip r:embed="rId3"/>
+          <a:stretch>
+            <a:fillRect/>
+          </a:stretch>
+        </p:blipFill>
+        <p:spPr>
+          <a:xfrm>
+            <a:off x="5806439" y="1097280"/>
+            <a:ext cx="6204857" cy="4343400"/>
+          </a:xfrm>
+          <a:prstGeom prst="rect">
+            <a:avLst/>
+          </a:prstGeom>
+        </p:spPr>
+      </p:pic>
+    </p:spTree>
+    <p:extLst>
+      <p:ext uri="{BB962C8B-B14F-4D97-AF65-F5344CB8AC3E}">
+        <p14:creationId xmlns:p14="http://schemas.microsoft.com/office/powerpoint/2010/main" val="3313697101"/>
+      </p:ext>
+    </p:extLst>
+  </p:cSld>
+  <p:clrMapOvr>
+    <a:masterClrMapping/>
+  </p:clrMapOvr>
+</p:sld>
+</file>
+
+<file path=ppt/slides/slide16.xml><?xml version="1.0" encoding="utf-8"?>
+<p:sld xmlns:a="http://schemas.openxmlformats.org/drawingml/2006/main" xmlns:r="http://schemas.openxmlformats.org/officeDocument/2006/relationships" xmlns:p="http://schemas.openxmlformats.org/presentationml/2006/main">
   <p:cSld>
     <p:bg>
       <p:bgPr>
@@ -5130,7 +5772,14 @@
         <p:cNvGrpSpPr/>
         <p:nvPr/>
       </p:nvGrpSpPr>
-      <p:grpSpPr/>
+      <p:grpSpPr>
+        <a:xfrm>
+          <a:off x="0" y="0"/>
+          <a:ext cx="0" cy="0"/>
+          <a:chOff x="0" y="0"/>
+          <a:chExt cx="0" cy="0"/>
+        </a:xfrm>
+      </p:grpSpPr>
       <p:sp>
         <p:nvSpPr>
           <p:cNvPr id="2" name="Rectangle 1"/>
@@ -5171,6 +5820,7 @@
           <a:lstStyle/>
           <a:p>
             <a:pPr algn="ctr"/>
+            <a:endParaRPr/>
           </a:p>
         </p:txBody>
       </p:sp>
@@ -5414,7 +6064,7 @@
               </a:spcAft>
             </a:pPr>
             <a:r>
-              <a:rPr b="1" sz="1600">
+              <a:rPr sz="1600" b="1">
                 <a:solidFill>
                   <a:srgbClr val="11284C"/>
                 </a:solidFill>
@@ -5485,7 +6135,7 @@
               </a:spcAft>
             </a:pPr>
             <a:r>
-              <a:rPr b="1" sz="1600">
+              <a:rPr sz="1600" b="1">
                 <a:solidFill>
                   <a:srgbClr val="11284C"/>
                 </a:solidFill>
@@ -5517,8 +6167,8 @@
 </p:sld>
 </file>
 
-<file path=ppt/slides/slide16.xml><?xml version="1.0" encoding="utf-8"?>
-<p:sld xmlns:a="http://schemas.openxmlformats.org/drawingml/2006/main" xmlns:p="http://schemas.openxmlformats.org/presentationml/2006/main" xmlns:r="http://schemas.openxmlformats.org/officeDocument/2006/relationships">
+<file path=ppt/slides/slide17.xml><?xml version="1.0" encoding="utf-8"?>
+<p:sld xmlns:a="http://schemas.openxmlformats.org/drawingml/2006/main" xmlns:r="http://schemas.openxmlformats.org/officeDocument/2006/relationships" xmlns:p="http://schemas.openxmlformats.org/presentationml/2006/main">
   <p:cSld>
     <p:bg>
       <p:bgPr>
@@ -5534,7 +6184,14 @@
         <p:cNvGrpSpPr/>
         <p:nvPr/>
       </p:nvGrpSpPr>
-      <p:grpSpPr/>
+      <p:grpSpPr>
+        <a:xfrm>
+          <a:off x="0" y="0"/>
+          <a:ext cx="0" cy="0"/>
+          <a:chOff x="0" y="0"/>
+          <a:chExt cx="0" cy="0"/>
+        </a:xfrm>
+      </p:grpSpPr>
       <p:sp>
         <p:nvSpPr>
           <p:cNvPr id="2" name="Rectangle 1"/>
@@ -5575,6 +6232,7 @@
           <a:lstStyle/>
           <a:p>
             <a:pPr algn="ctr"/>
+            <a:endParaRPr/>
           </a:p>
         </p:txBody>
       </p:sp>
@@ -5834,7 +6492,7 @@
               </a:spcAft>
             </a:pPr>
             <a:r>
-              <a:rPr b="1" sz="1600">
+              <a:rPr sz="1600" b="1">
                 <a:solidFill>
                   <a:srgbClr val="11284C"/>
                 </a:solidFill>
@@ -5867,7 +6525,7 @@
 </file>
 
 <file path=ppt/slides/slide2.xml><?xml version="1.0" encoding="utf-8"?>
-<p:sld xmlns:a="http://schemas.openxmlformats.org/drawingml/2006/main" xmlns:p="http://schemas.openxmlformats.org/presentationml/2006/main" xmlns:r="http://schemas.openxmlformats.org/officeDocument/2006/relationships">
+<p:sld xmlns:a="http://schemas.openxmlformats.org/drawingml/2006/main" xmlns:r="http://schemas.openxmlformats.org/officeDocument/2006/relationships" xmlns:p="http://schemas.openxmlformats.org/presentationml/2006/main">
   <p:cSld>
     <p:bg>
       <p:bgPr>
@@ -5883,7 +6541,14 @@
         <p:cNvGrpSpPr/>
         <p:nvPr/>
       </p:nvGrpSpPr>
-      <p:grpSpPr/>
+      <p:grpSpPr>
+        <a:xfrm>
+          <a:off x="0" y="0"/>
+          <a:ext cx="0" cy="0"/>
+          <a:chOff x="0" y="0"/>
+          <a:chExt cx="0" cy="0"/>
+        </a:xfrm>
+      </p:grpSpPr>
       <p:sp>
         <p:nvSpPr>
           <p:cNvPr id="2" name="Rectangle 1"/>
@@ -5924,6 +6589,7 @@
           <a:lstStyle/>
           <a:p>
             <a:pPr algn="ctr"/>
+            <a:endParaRPr/>
           </a:p>
         </p:txBody>
       </p:sp>
@@ -6167,7 +6833,7 @@
               </a:spcAft>
             </a:pPr>
             <a:r>
-              <a:rPr b="1" sz="1600">
+              <a:rPr sz="1600" b="1">
                 <a:solidFill>
                   <a:srgbClr val="11284C"/>
                 </a:solidFill>
@@ -6238,7 +6904,7 @@
               </a:spcAft>
             </a:pPr>
             <a:r>
-              <a:rPr b="1" sz="1600">
+              <a:rPr sz="1600" b="1">
                 <a:solidFill>
                   <a:srgbClr val="11284C"/>
                 </a:solidFill>
@@ -6271,7 +6937,7 @@
 </file>
 
 <file path=ppt/slides/slide3.xml><?xml version="1.0" encoding="utf-8"?>
-<p:sld xmlns:a="http://schemas.openxmlformats.org/drawingml/2006/main" xmlns:p="http://schemas.openxmlformats.org/presentationml/2006/main" xmlns:r="http://schemas.openxmlformats.org/officeDocument/2006/relationships">
+<p:sld xmlns:a="http://schemas.openxmlformats.org/drawingml/2006/main" xmlns:r="http://schemas.openxmlformats.org/officeDocument/2006/relationships" xmlns:p="http://schemas.openxmlformats.org/presentationml/2006/main">
   <p:cSld>
     <p:bg>
       <p:bgPr>
@@ -6287,7 +6953,14 @@
         <p:cNvGrpSpPr/>
         <p:nvPr/>
       </p:nvGrpSpPr>
-      <p:grpSpPr/>
+      <p:grpSpPr>
+        <a:xfrm>
+          <a:off x="0" y="0"/>
+          <a:ext cx="0" cy="0"/>
+          <a:chOff x="0" y="0"/>
+          <a:chExt cx="0" cy="0"/>
+        </a:xfrm>
+      </p:grpSpPr>
       <p:sp>
         <p:nvSpPr>
           <p:cNvPr id="2" name="Rectangle 1"/>
@@ -6328,6 +7001,7 @@
           <a:lstStyle/>
           <a:p>
             <a:pPr algn="ctr"/>
+            <a:endParaRPr/>
           </a:p>
         </p:txBody>
       </p:sp>
@@ -6484,7 +7158,7 @@
               </a:spcAft>
             </a:pPr>
             <a:r>
-              <a:rPr b="1" sz="1600">
+              <a:rPr sz="1600" b="1">
                 <a:solidFill>
                   <a:srgbClr val="11284C"/>
                 </a:solidFill>
@@ -6564,7 +7238,7 @@
               </a:spcAft>
             </a:pPr>
             <a:r>
-              <a:rPr b="1" sz="1600">
+              <a:rPr sz="1600" b="1">
                 <a:solidFill>
                   <a:srgbClr val="11284C"/>
                 </a:solidFill>
@@ -6644,7 +7318,7 @@
               </a:spcAft>
             </a:pPr>
             <a:r>
-              <a:rPr b="1" sz="1600">
+              <a:rPr sz="1600" b="1">
                 <a:solidFill>
                   <a:srgbClr val="11284C"/>
                 </a:solidFill>
@@ -6725,7 +7399,7 @@
 </file>
 
 <file path=ppt/slides/slide4.xml><?xml version="1.0" encoding="utf-8"?>
-<p:sld xmlns:a="http://schemas.openxmlformats.org/drawingml/2006/main" xmlns:p="http://schemas.openxmlformats.org/presentationml/2006/main" xmlns:r="http://schemas.openxmlformats.org/officeDocument/2006/relationships">
+<p:sld xmlns:a="http://schemas.openxmlformats.org/drawingml/2006/main" xmlns:r="http://schemas.openxmlformats.org/officeDocument/2006/relationships" xmlns:p="http://schemas.openxmlformats.org/presentationml/2006/main">
   <p:cSld>
     <p:bg>
       <p:bgPr>
@@ -6741,7 +7415,14 @@
         <p:cNvGrpSpPr/>
         <p:nvPr/>
       </p:nvGrpSpPr>
-      <p:grpSpPr/>
+      <p:grpSpPr>
+        <a:xfrm>
+          <a:off x="0" y="0"/>
+          <a:ext cx="0" cy="0"/>
+          <a:chOff x="0" y="0"/>
+          <a:chExt cx="0" cy="0"/>
+        </a:xfrm>
+      </p:grpSpPr>
       <p:sp>
         <p:nvSpPr>
           <p:cNvPr id="2" name="Rectangle 1"/>
@@ -6782,6 +7463,7 @@
           <a:lstStyle/>
           <a:p>
             <a:pPr algn="ctr"/>
+            <a:endParaRPr/>
           </a:p>
         </p:txBody>
       </p:sp>
@@ -6910,12 +7592,48 @@
                 <a:tableStyleId>{5C22544A-7EE6-4342-B048-85BDC9FD1C3A}</a:tableStyleId>
               </a:tblPr>
               <a:tblGrid>
-                <a:gridCol w="2103120"/>
-                <a:gridCol w="960120"/>
-                <a:gridCol w="914400"/>
-                <a:gridCol w="960120"/>
-                <a:gridCol w="914400"/>
-                <a:gridCol w="1051560"/>
+                <a:gridCol w="2103120">
+                  <a:extLst>
+                    <a:ext uri="{9D8B030D-6E8A-4147-A177-3AD203B41FA5}">
+                      <a16:colId xmlns:a16="http://schemas.microsoft.com/office/drawing/2014/main" val="20000"/>
+                    </a:ext>
+                  </a:extLst>
+                </a:gridCol>
+                <a:gridCol w="960120">
+                  <a:extLst>
+                    <a:ext uri="{9D8B030D-6E8A-4147-A177-3AD203B41FA5}">
+                      <a16:colId xmlns:a16="http://schemas.microsoft.com/office/drawing/2014/main" val="20001"/>
+                    </a:ext>
+                  </a:extLst>
+                </a:gridCol>
+                <a:gridCol w="914400">
+                  <a:extLst>
+                    <a:ext uri="{9D8B030D-6E8A-4147-A177-3AD203B41FA5}">
+                      <a16:colId xmlns:a16="http://schemas.microsoft.com/office/drawing/2014/main" val="20002"/>
+                    </a:ext>
+                  </a:extLst>
+                </a:gridCol>
+                <a:gridCol w="960120">
+                  <a:extLst>
+                    <a:ext uri="{9D8B030D-6E8A-4147-A177-3AD203B41FA5}">
+                      <a16:colId xmlns:a16="http://schemas.microsoft.com/office/drawing/2014/main" val="20003"/>
+                    </a:ext>
+                  </a:extLst>
+                </a:gridCol>
+                <a:gridCol w="914400">
+                  <a:extLst>
+                    <a:ext uri="{9D8B030D-6E8A-4147-A177-3AD203B41FA5}">
+                      <a16:colId xmlns:a16="http://schemas.microsoft.com/office/drawing/2014/main" val="20004"/>
+                    </a:ext>
+                  </a:extLst>
+                </a:gridCol>
+                <a:gridCol w="1051560">
+                  <a:extLst>
+                    <a:ext uri="{9D8B030D-6E8A-4147-A177-3AD203B41FA5}">
+                      <a16:colId xmlns:a16="http://schemas.microsoft.com/office/drawing/2014/main" val="20005"/>
+                    </a:ext>
+                  </a:extLst>
+                </a:gridCol>
               </a:tblGrid>
               <a:tr h="594360">
                 <a:tc>
@@ -6925,7 +7643,7 @@
                     <a:p>
                       <a:pPr algn="ctr"/>
                       <a:r>
-                        <a:rPr b="1" sz="1100">
+                        <a:rPr sz="1100" b="1">
                           <a:solidFill>
                             <a:srgbClr val="FFFFFF"/>
                           </a:solidFill>
@@ -6948,7 +7666,7 @@
                     <a:p>
                       <a:pPr algn="ctr"/>
                       <a:r>
-                        <a:rPr b="1" sz="1100">
+                        <a:rPr sz="1100" b="1">
                           <a:solidFill>
                             <a:srgbClr val="FFFFFF"/>
                           </a:solidFill>
@@ -6971,7 +7689,7 @@
                     <a:p>
                       <a:pPr algn="ctr"/>
                       <a:r>
-                        <a:rPr b="1" sz="1100">
+                        <a:rPr sz="1100" b="1">
                           <a:solidFill>
                             <a:srgbClr val="FFFFFF"/>
                           </a:solidFill>
@@ -6994,7 +7712,7 @@
                     <a:p>
                       <a:pPr algn="ctr"/>
                       <a:r>
-                        <a:rPr b="1" sz="1100">
+                        <a:rPr sz="1100" b="1">
                           <a:solidFill>
                             <a:srgbClr val="FFFFFF"/>
                           </a:solidFill>
@@ -7017,7 +7735,7 @@
                     <a:p>
                       <a:pPr algn="ctr"/>
                       <a:r>
-                        <a:rPr b="1" sz="1100">
+                        <a:rPr sz="1100" b="1">
                           <a:solidFill>
                             <a:srgbClr val="FFFFFF"/>
                           </a:solidFill>
@@ -7040,7 +7758,7 @@
                     <a:p>
                       <a:pPr algn="ctr"/>
                       <a:r>
-                        <a:rPr b="1" sz="1100">
+                        <a:rPr sz="1100" b="1">
                           <a:solidFill>
                             <a:srgbClr val="FFFFFF"/>
                           </a:solidFill>
@@ -7056,6 +7774,11 @@
                     </a:solidFill>
                   </a:tcPr>
                 </a:tc>
+                <a:extLst>
+                  <a:ext uri="{0D108BD9-81ED-4DB2-BD59-A6C34878D82A}">
+                    <a16:rowId xmlns:a16="http://schemas.microsoft.com/office/drawing/2014/main" val="10000"/>
+                  </a:ext>
+                </a:extLst>
               </a:tr>
               <a:tr h="594360">
                 <a:tc>
@@ -7196,6 +7919,11 @@
                     </a:solidFill>
                   </a:tcPr>
                 </a:tc>
+                <a:extLst>
+                  <a:ext uri="{0D108BD9-81ED-4DB2-BD59-A6C34878D82A}">
+                    <a16:rowId xmlns:a16="http://schemas.microsoft.com/office/drawing/2014/main" val="10001"/>
+                  </a:ext>
+                </a:extLst>
               </a:tr>
               <a:tr h="594360">
                 <a:tc>
@@ -7336,6 +8064,11 @@
                     </a:solidFill>
                   </a:tcPr>
                 </a:tc>
+                <a:extLst>
+                  <a:ext uri="{0D108BD9-81ED-4DB2-BD59-A6C34878D82A}">
+                    <a16:rowId xmlns:a16="http://schemas.microsoft.com/office/drawing/2014/main" val="10002"/>
+                  </a:ext>
+                </a:extLst>
               </a:tr>
               <a:tr h="594360">
                 <a:tc>
@@ -7476,6 +8209,11 @@
                     </a:solidFill>
                   </a:tcPr>
                 </a:tc>
+                <a:extLst>
+                  <a:ext uri="{0D108BD9-81ED-4DB2-BD59-A6C34878D82A}">
+                    <a16:rowId xmlns:a16="http://schemas.microsoft.com/office/drawing/2014/main" val="10003"/>
+                  </a:ext>
+                </a:extLst>
               </a:tr>
               <a:tr h="594360">
                 <a:tc>
@@ -7616,6 +8354,11 @@
                     </a:solidFill>
                   </a:tcPr>
                 </a:tc>
+                <a:extLst>
+                  <a:ext uri="{0D108BD9-81ED-4DB2-BD59-A6C34878D82A}">
+                    <a16:rowId xmlns:a16="http://schemas.microsoft.com/office/drawing/2014/main" val="10004"/>
+                  </a:ext>
+                </a:extLst>
               </a:tr>
               <a:tr h="594360">
                 <a:tc>
@@ -7756,6 +8499,11 @@
                     </a:solidFill>
                   </a:tcPr>
                 </a:tc>
+                <a:extLst>
+                  <a:ext uri="{0D108BD9-81ED-4DB2-BD59-A6C34878D82A}">
+                    <a16:rowId xmlns:a16="http://schemas.microsoft.com/office/drawing/2014/main" val="10005"/>
+                  </a:ext>
+                </a:extLst>
               </a:tr>
             </a:tbl>
           </a:graphicData>
@@ -7808,7 +8556,7 @@
               </a:spcAft>
             </a:pPr>
             <a:r>
-              <a:rPr b="1" sz="1600">
+              <a:rPr sz="1600" b="1">
                 <a:solidFill>
                   <a:srgbClr val="11284C"/>
                 </a:solidFill>
@@ -7859,7 +8607,7 @@
 </file>
 
 <file path=ppt/slides/slide5.xml><?xml version="1.0" encoding="utf-8"?>
-<p:sld xmlns:a="http://schemas.openxmlformats.org/drawingml/2006/main" xmlns:p="http://schemas.openxmlformats.org/presentationml/2006/main" xmlns:r="http://schemas.openxmlformats.org/officeDocument/2006/relationships">
+<p:sld xmlns:a="http://schemas.openxmlformats.org/drawingml/2006/main" xmlns:r="http://schemas.openxmlformats.org/officeDocument/2006/relationships" xmlns:p="http://schemas.openxmlformats.org/presentationml/2006/main">
   <p:cSld>
     <p:bg>
       <p:bgPr>
@@ -7875,7 +8623,14 @@
         <p:cNvGrpSpPr/>
         <p:nvPr/>
       </p:nvGrpSpPr>
-      <p:grpSpPr/>
+      <p:grpSpPr>
+        <a:xfrm>
+          <a:off x="0" y="0"/>
+          <a:ext cx="0" cy="0"/>
+          <a:chOff x="0" y="0"/>
+          <a:chExt cx="0" cy="0"/>
+        </a:xfrm>
+      </p:grpSpPr>
       <p:sp>
         <p:nvSpPr>
           <p:cNvPr id="2" name="Rectangle 1"/>
@@ -7916,6 +8671,7 @@
           <a:lstStyle/>
           <a:p>
             <a:pPr algn="ctr"/>
+            <a:endParaRPr/>
           </a:p>
         </p:txBody>
       </p:sp>
@@ -8120,7 +8876,7 @@
               </a:spcAft>
             </a:pPr>
             <a:r>
-              <a:rPr b="1" sz="1600">
+              <a:rPr sz="1600" b="1">
                 <a:solidFill>
                   <a:srgbClr val="11284C"/>
                 </a:solidFill>
@@ -8153,7 +8909,7 @@
 </file>
 
 <file path=ppt/slides/slide6.xml><?xml version="1.0" encoding="utf-8"?>
-<p:sld xmlns:a="http://schemas.openxmlformats.org/drawingml/2006/main" xmlns:p="http://schemas.openxmlformats.org/presentationml/2006/main" xmlns:r="http://schemas.openxmlformats.org/officeDocument/2006/relationships">
+<p:sld xmlns:a="http://schemas.openxmlformats.org/drawingml/2006/main" xmlns:r="http://schemas.openxmlformats.org/officeDocument/2006/relationships" xmlns:p="http://schemas.openxmlformats.org/presentationml/2006/main">
   <p:cSld>
     <p:bg>
       <p:bgPr>
@@ -8169,7 +8925,14 @@
         <p:cNvGrpSpPr/>
         <p:nvPr/>
       </p:nvGrpSpPr>
-      <p:grpSpPr/>
+      <p:grpSpPr>
+        <a:xfrm>
+          <a:off x="0" y="0"/>
+          <a:ext cx="0" cy="0"/>
+          <a:chOff x="0" y="0"/>
+          <a:chExt cx="0" cy="0"/>
+        </a:xfrm>
+      </p:grpSpPr>
       <p:sp>
         <p:nvSpPr>
           <p:cNvPr id="2" name="Rectangle 1"/>
@@ -8210,6 +8973,7 @@
           <a:lstStyle/>
           <a:p>
             <a:pPr algn="ctr"/>
+            <a:endParaRPr/>
           </a:p>
         </p:txBody>
       </p:sp>
@@ -8414,7 +9178,7 @@
               </a:spcAft>
             </a:pPr>
             <a:r>
-              <a:rPr b="1" sz="1600">
+              <a:rPr sz="1600" b="1">
                 <a:solidFill>
                   <a:srgbClr val="11284C"/>
                 </a:solidFill>
@@ -8447,7 +9211,7 @@
 </file>
 
 <file path=ppt/slides/slide7.xml><?xml version="1.0" encoding="utf-8"?>
-<p:sld xmlns:a="http://schemas.openxmlformats.org/drawingml/2006/main" xmlns:p="http://schemas.openxmlformats.org/presentationml/2006/main" xmlns:r="http://schemas.openxmlformats.org/officeDocument/2006/relationships">
+<p:sld xmlns:a="http://schemas.openxmlformats.org/drawingml/2006/main" xmlns:r="http://schemas.openxmlformats.org/officeDocument/2006/relationships" xmlns:p="http://schemas.openxmlformats.org/presentationml/2006/main">
   <p:cSld>
     <p:bg>
       <p:bgPr>
@@ -8463,7 +9227,14 @@
         <p:cNvGrpSpPr/>
         <p:nvPr/>
       </p:nvGrpSpPr>
-      <p:grpSpPr/>
+      <p:grpSpPr>
+        <a:xfrm>
+          <a:off x="0" y="0"/>
+          <a:ext cx="0" cy="0"/>
+          <a:chOff x="0" y="0"/>
+          <a:chExt cx="0" cy="0"/>
+        </a:xfrm>
+      </p:grpSpPr>
       <p:sp>
         <p:nvSpPr>
           <p:cNvPr id="2" name="Rectangle 1"/>
@@ -8504,6 +9275,7 @@
           <a:lstStyle/>
           <a:p>
             <a:pPr algn="ctr"/>
+            <a:endParaRPr/>
           </a:p>
         </p:txBody>
       </p:sp>
@@ -8733,7 +9505,7 @@
 </file>
 
 <file path=ppt/slides/slide8.xml><?xml version="1.0" encoding="utf-8"?>
-<p:sld xmlns:a="http://schemas.openxmlformats.org/drawingml/2006/main" xmlns:p="http://schemas.openxmlformats.org/presentationml/2006/main" xmlns:r="http://schemas.openxmlformats.org/officeDocument/2006/relationships">
+<p:sld xmlns:a="http://schemas.openxmlformats.org/drawingml/2006/main" xmlns:r="http://schemas.openxmlformats.org/officeDocument/2006/relationships" xmlns:p="http://schemas.openxmlformats.org/presentationml/2006/main">
   <p:cSld>
     <p:bg>
       <p:bgPr>
@@ -8749,7 +9521,14 @@
         <p:cNvGrpSpPr/>
         <p:nvPr/>
       </p:nvGrpSpPr>
-      <p:grpSpPr/>
+      <p:grpSpPr>
+        <a:xfrm>
+          <a:off x="0" y="0"/>
+          <a:ext cx="0" cy="0"/>
+          <a:chOff x="0" y="0"/>
+          <a:chExt cx="0" cy="0"/>
+        </a:xfrm>
+      </p:grpSpPr>
       <p:sp>
         <p:nvSpPr>
           <p:cNvPr id="2" name="Rectangle 1"/>
@@ -8790,6 +9569,7 @@
           <a:lstStyle/>
           <a:p>
             <a:pPr algn="ctr"/>
+            <a:endParaRPr/>
           </a:p>
         </p:txBody>
       </p:sp>
@@ -8994,7 +9774,7 @@
               </a:spcAft>
             </a:pPr>
             <a:r>
-              <a:rPr b="1" sz="1600">
+              <a:rPr sz="1600" b="1">
                 <a:solidFill>
                   <a:srgbClr val="11284C"/>
                 </a:solidFill>
@@ -9027,7 +9807,7 @@
 </file>
 
 <file path=ppt/slides/slide9.xml><?xml version="1.0" encoding="utf-8"?>
-<p:sld xmlns:a="http://schemas.openxmlformats.org/drawingml/2006/main" xmlns:p="http://schemas.openxmlformats.org/presentationml/2006/main" xmlns:r="http://schemas.openxmlformats.org/officeDocument/2006/relationships">
+<p:sld xmlns:a="http://schemas.openxmlformats.org/drawingml/2006/main" xmlns:r="http://schemas.openxmlformats.org/officeDocument/2006/relationships" xmlns:p="http://schemas.openxmlformats.org/presentationml/2006/main">
   <p:cSld>
     <p:bg>
       <p:bgPr>
@@ -9043,7 +9823,14 @@
         <p:cNvGrpSpPr/>
         <p:nvPr/>
       </p:nvGrpSpPr>
-      <p:grpSpPr/>
+      <p:grpSpPr>
+        <a:xfrm>
+          <a:off x="0" y="0"/>
+          <a:ext cx="0" cy="0"/>
+          <a:chOff x="0" y="0"/>
+          <a:chExt cx="0" cy="0"/>
+        </a:xfrm>
+      </p:grpSpPr>
       <p:sp>
         <p:nvSpPr>
           <p:cNvPr id="2" name="Rectangle 1"/>
@@ -9084,6 +9871,7 @@
           <a:lstStyle/>
           <a:p>
             <a:pPr algn="ctr"/>
+            <a:endParaRPr/>
           </a:p>
         </p:txBody>
       </p:sp>
